--- a/presentation/World_Cup_Presentation.pptx
+++ b/presentation/World_Cup_Presentation.pptx
@@ -8645,6 +8645,10 @@
           </a:solidFill>
           <a:ln/>
         </p:spPr>
+        <p:txBody>
+          <a:bodyPr/>
+          <a:p/>
+        </p:txBody>
       </p:sp>
       <p:sp>
         <p:nvSpPr>
@@ -8707,6 +8711,10 @@
           </a:solidFill>
           <a:ln/>
         </p:spPr>
+        <p:txBody>
+          <a:bodyPr/>
+          <a:p/>
+        </p:txBody>
       </p:sp>
       <p:sp>
         <p:nvSpPr>
@@ -8769,6 +8777,10 @@
           </a:solidFill>
           <a:ln/>
         </p:spPr>
+        <p:txBody>
+          <a:bodyPr/>
+          <a:p/>
+        </p:txBody>
       </p:sp>
       <p:sp>
         <p:nvSpPr>
@@ -8870,6 +8882,10 @@
           </a:solidFill>
           <a:ln/>
         </p:spPr>
+        <p:txBody>
+          <a:bodyPr/>
+          <a:p/>
+        </p:txBody>
       </p:sp>
       <p:sp>
         <p:nvSpPr>
@@ -8907,7 +8923,7 @@
                 <a:ea typeface="Calibri" pitchFamily="34" charset="-122"/>
                 <a:cs typeface="Calibri" pitchFamily="34" charset="-120"/>
               </a:rPr>
-              <a:t>Player-level features (FIFA ratings, market values) and tournament-importance weighting</a:t>
+              <a:t>Player-level features (FIFA ratings, market values, injury/suspension news) - the clearest remaining gap, since match importance and rest days are already tested and added</a:t>
             </a:r>
             <a:endParaRPr lang="en-US" sz="1250" dirty="0"/>
           </a:p>
@@ -8932,6 +8948,10 @@
           </a:solidFill>
           <a:ln/>
         </p:spPr>
+        <p:txBody>
+          <a:bodyPr/>
+          <a:p/>
+        </p:txBody>
       </p:sp>
       <p:sp>
         <p:nvSpPr>
@@ -8994,6 +9014,10 @@
           </a:solidFill>
           <a:ln/>
         </p:spPr>
+        <p:txBody>
+          <a:bodyPr/>
+          <a:p/>
+        </p:txBody>
       </p:sp>
       <p:sp>
         <p:nvSpPr>
@@ -9056,6 +9080,10 @@
           </a:solidFill>
           <a:ln/>
         </p:spPr>
+        <p:txBody>
+          <a:bodyPr/>
+          <a:p/>
+        </p:txBody>
       </p:sp>
       <p:sp>
         <p:nvSpPr>

--- a/presentation/World_Cup_Presentation.pptx
+++ b/presentation/World_Cup_Presentation.pptx
@@ -2712,7 +2712,7 @@
                 <a:ea typeface="Calibri" pitchFamily="34" charset="-122"/>
                 <a:cs typeface="Calibri" pitchFamily="34" charset="-120"/>
               </a:rPr>
-              <a:t>Accuracy (0.596) looks solid — macro-F1 (0.446) tells the real story.</a:t>
+              <a:t>Accuracy (0.596) looks solid — macro-F1 (0.443) tells the real story.</a:t>
             </a:r>
             <a:endParaRPr lang="en-US" sz="1400" dirty="0"/>
           </a:p>
@@ -3365,7 +3365,7 @@
                           <a:ea typeface="Calibri" pitchFamily="34" charset="-122"/>
                           <a:cs typeface="Calibri" pitchFamily="34" charset="-120"/>
                         </a:rPr>
-                        <a:t>0.57</a:t>
+                        <a:t>0.58</a:t>
                       </a:r>
                       <a:endParaRPr lang="en-US" sz="1200" dirty="0">
                         <a:latin typeface="Calibri" charset="0"/>
@@ -3430,7 +3430,7 @@
                           <a:ea typeface="Calibri" pitchFamily="34" charset="-122"/>
                           <a:cs typeface="Calibri" pitchFamily="34" charset="-120"/>
                         </a:rPr>
-                        <a:t>0.60</a:t>
+                        <a:t>0.61</a:t>
                       </a:r>
                       <a:endParaRPr lang="en-US" sz="1200" dirty="0">
                         <a:latin typeface="Calibri" charset="0"/>
@@ -3630,7 +3630,7 @@
                           <a:ea typeface="Calibri" pitchFamily="34" charset="-122"/>
                           <a:cs typeface="Calibri" pitchFamily="34" charset="-120"/>
                         </a:rPr>
-                        <a:t>0.32</a:t>
+                        <a:t>0.34</a:t>
                       </a:r>
                       <a:endParaRPr lang="en-US" sz="1200" dirty="0">
                         <a:latin typeface="Calibri" charset="0"/>
@@ -3698,7 +3698,7 @@
                           <a:ea typeface="Calibri" pitchFamily="34" charset="-122"/>
                           <a:cs typeface="Calibri" pitchFamily="34" charset="-120"/>
                         </a:rPr>
-                        <a:t>0.02</a:t>
+                        <a:t>0.01</a:t>
                       </a:r>
                       <a:endParaRPr lang="en-US" sz="1200" dirty="0">
                         <a:latin typeface="Calibri" charset="0"/>
@@ -3766,7 +3766,7 @@
                           <a:ea typeface="Calibri" pitchFamily="34" charset="-122"/>
                           <a:cs typeface="Calibri" pitchFamily="34" charset="-120"/>
                         </a:rPr>
-                        <a:t>0.03</a:t>
+                        <a:t>0.02</a:t>
                       </a:r>
                       <a:endParaRPr lang="en-US" sz="1200" dirty="0">
                         <a:latin typeface="Calibri" charset="0"/>
@@ -3843,6 +3843,10 @@
           </a:solidFill>
           <a:ln/>
         </p:spPr>
+        <p:txBody>
+          <a:bodyPr/>
+          <a:p/>
+        </p:txBody>
       </p:sp>
       <p:sp>
         <p:nvSpPr>
@@ -3877,7 +3881,7 @@
                 <a:ea typeface="Cambria" pitchFamily="34" charset="-122"/>
                 <a:cs typeface="Cambria" pitchFamily="34" charset="-120"/>
               </a:rPr>
-              <a:t>2%</a:t>
+              <a:t>1%</a:t>
             </a:r>
             <a:endParaRPr lang="en-US" sz="4200" dirty="0"/>
           </a:p>
@@ -3919,7 +3923,7 @@
                 <a:ea typeface="Calibri" pitchFamily="34" charset="-122"/>
                 <a:cs typeface="Calibri" pitchFamily="34" charset="-120"/>
               </a:rPr>
-              <a:t>Draw recall — only ~35 of 2,297 actual draws correctly identified. A class-imbalance effect: predicting “not a draw” is the model's lower-risk strategy.</a:t>
+              <a:t>Draw recall — only ~23 of 2,297 actual draws correctly identified. A class-imbalance effect: predicting “not a draw” is the model's lower-risk strategy.</a:t>
             </a:r>
             <a:endParaRPr lang="en-US" sz="1050" dirty="0"/>
           </a:p>
@@ -3985,6 +3989,10 @@
           </a:solidFill>
           <a:ln/>
         </p:spPr>
+        <p:txBody>
+          <a:bodyPr/>
+          <a:p/>
+        </p:txBody>
       </p:sp>
       <p:sp>
         <p:nvSpPr>
@@ -4099,6 +4107,10 @@
           </a:solidFill>
           <a:ln/>
         </p:spPr>
+        <p:txBody>
+          <a:bodyPr/>
+          <a:p/>
+        </p:txBody>
       </p:sp>
       <p:sp>
         <p:nvSpPr>
@@ -4213,6 +4225,10 @@
           </a:solidFill>
           <a:ln/>
         </p:spPr>
+        <p:txBody>
+          <a:bodyPr/>
+          <a:p/>
+        </p:txBody>
       </p:sp>
       <p:sp>
         <p:nvSpPr>
@@ -16165,7 +16181,7 @@
                           <a:ea typeface="Calibri" pitchFamily="34" charset="-122"/>
                           <a:cs typeface="Calibri" pitchFamily="34" charset="-120"/>
                         </a:rPr>
-                        <a:t>0.597</a:t>
+                        <a:t>0.598</a:t>
                       </a:r>
                       <a:endParaRPr lang="en-US" sz="1150" dirty="0">
                         <a:latin typeface="Calibri" charset="0"/>
@@ -16230,7 +16246,7 @@
                           <a:ea typeface="Calibri" pitchFamily="34" charset="-122"/>
                           <a:cs typeface="Calibri" pitchFamily="34" charset="-120"/>
                         </a:rPr>
-                        <a:t>0.543</a:t>
+                        <a:t>0.539</a:t>
                       </a:r>
                       <a:endParaRPr lang="en-US" sz="1150" dirty="0">
                         <a:latin typeface="Calibri" charset="0"/>
@@ -16295,7 +16311,7 @@
                           <a:ea typeface="Calibri" pitchFamily="34" charset="-122"/>
                           <a:cs typeface="Calibri" pitchFamily="34" charset="-120"/>
                         </a:rPr>
-                        <a:t>0.498</a:t>
+                        <a:t>0.497</a:t>
                       </a:r>
                       <a:endParaRPr lang="en-US" sz="1150" dirty="0">
                         <a:latin typeface="Calibri" charset="0"/>
@@ -16360,7 +16376,7 @@
                           <a:ea typeface="Calibri" pitchFamily="34" charset="-122"/>
                           <a:cs typeface="Calibri" pitchFamily="34" charset="-120"/>
                         </a:rPr>
-                        <a:t>0.440</a:t>
+                        <a:t>0.441</a:t>
                       </a:r>
                       <a:endParaRPr lang="en-US" sz="1150" dirty="0">
                         <a:latin typeface="Calibri" charset="0"/>
@@ -16495,7 +16511,7 @@
                           <a:ea typeface="Calibri" pitchFamily="34" charset="-122"/>
                           <a:cs typeface="Calibri" pitchFamily="34" charset="-120"/>
                         </a:rPr>
-                        <a:t>0.596</a:t>
+                        <a:t>0.597</a:t>
                       </a:r>
                       <a:endParaRPr lang="en-US" sz="1150" dirty="0">
                         <a:latin typeface="Calibri" charset="0"/>
@@ -16563,7 +16579,7 @@
                           <a:ea typeface="Calibri" pitchFamily="34" charset="-122"/>
                           <a:cs typeface="Calibri" pitchFamily="34" charset="-120"/>
                         </a:rPr>
-                        <a:t>0.500</a:t>
+                        <a:t>0.510</a:t>
                       </a:r>
                       <a:endParaRPr lang="en-US" sz="1150" dirty="0">
                         <a:latin typeface="Calibri" charset="0"/>
@@ -16631,7 +16647,7 @@
                           <a:ea typeface="Calibri" pitchFamily="34" charset="-122"/>
                           <a:cs typeface="Calibri" pitchFamily="34" charset="-120"/>
                         </a:rPr>
-                        <a:t>0.498</a:t>
+                        <a:t>0.499</a:t>
                       </a:r>
                       <a:endParaRPr lang="en-US" sz="1150" dirty="0">
                         <a:latin typeface="Calibri" charset="0"/>
@@ -16699,7 +16715,7 @@
                           <a:ea typeface="Calibri" pitchFamily="34" charset="-122"/>
                           <a:cs typeface="Calibri" pitchFamily="34" charset="-120"/>
                         </a:rPr>
-                        <a:t>0.446</a:t>
+                        <a:t>0.443</a:t>
                       </a:r>
                       <a:endParaRPr lang="en-US" sz="1150" dirty="0">
                         <a:latin typeface="Calibri" charset="0"/>
@@ -16834,7 +16850,7 @@
                           <a:ea typeface="Calibri" pitchFamily="34" charset="-122"/>
                           <a:cs typeface="Calibri" pitchFamily="34" charset="-120"/>
                         </a:rPr>
-                        <a:t>0.592</a:t>
+                        <a:t>0.594</a:t>
                       </a:r>
                       <a:endParaRPr lang="en-US" sz="1150" dirty="0">
                         <a:latin typeface="Calibri" charset="0"/>
@@ -16899,7 +16915,7 @@
                           <a:ea typeface="Calibri" pitchFamily="34" charset="-122"/>
                           <a:cs typeface="Calibri" pitchFamily="34" charset="-120"/>
                         </a:rPr>
-                        <a:t>0.480</a:t>
+                        <a:t>0.483</a:t>
                       </a:r>
                       <a:endParaRPr lang="en-US" sz="1150" dirty="0">
                         <a:latin typeface="Calibri" charset="0"/>
@@ -16964,7 +16980,7 @@
                           <a:ea typeface="Calibri" pitchFamily="34" charset="-122"/>
                           <a:cs typeface="Calibri" pitchFamily="34" charset="-120"/>
                         </a:rPr>
-                        <a:t>0.496</a:t>
+                        <a:t>0.497</a:t>
                       </a:r>
                       <a:endParaRPr lang="en-US" sz="1150" dirty="0">
                         <a:latin typeface="Calibri" charset="0"/>
@@ -17029,7 +17045,7 @@
                           <a:ea typeface="Calibri" pitchFamily="34" charset="-122"/>
                           <a:cs typeface="Calibri" pitchFamily="34" charset="-120"/>
                         </a:rPr>
-                        <a:t>0.446</a:t>
+                        <a:t>0.447</a:t>
                       </a:r>
                       <a:endParaRPr lang="en-US" sz="1150" dirty="0">
                         <a:latin typeface="Calibri" charset="0"/>
@@ -17118,22 +17134,139 @@
                 <a:ea typeface="Calibri" pitchFamily="34" charset="-122"/>
                 <a:cs typeface="Calibri" pitchFamily="34" charset="-120"/>
               </a:rPr>
-              <a:t>Random Forest selected: ties Gradient Boosting on macro-F1, and directly exposes feature importances used to explain why teams win.</a:t>
+              <a:t>Random Forest selected: all three models are within 0.006 macro-F1 of each other (not a meaningful gap on one split) — Random Forest is chosen for its native feature importances, used to explain why teams win.</a:t>
             </a:r>
             <a:endParaRPr lang="en-US" sz="1150" dirty="0"/>
+          </a:p>
+        </p:txBody>
+      </p:sp>
+      <p:sp>
+        <p:nvSpPr>
+          <p:cNvPr id="6" name="Text 2"/>
+          <p:cNvSpPr/>
+          <p:nvPr/>
+        </p:nvSpPr>
+        <p:spPr>
+          <a:xfrm>
+            <a:off x="7315200" y="4617720"/>
+            <a:ext cx="4251960" cy="320040"/>
+          </a:xfrm>
+          <a:prstGeom prst="rect">
+            <a:avLst/>
+          </a:prstGeom>
+          <a:noFill/>
+          <a:ln/>
+        </p:spPr>
+        <p:txBody>
+          <a:bodyPr wrap="square" rtlCol="0" anchor="ctr"/>
+          <a:lstStyle/>
+          <a:p>
+            <a:pPr algn="ctr" indent="0" marL="0">
+              <a:buNone/>
+            </a:pPr>
+            <a:r>
+              <a:rPr lang="en-US" sz="1100" i="1" dirty="0">
+                <a:solidFill>
+                  <a:srgbClr val="5B6660"/>
+                </a:solidFill>
+                <a:latin typeface="Calibri" pitchFamily="34" charset="0"/>
+                <a:ea typeface="Calibri" pitchFamily="34" charset="-122"/>
+                <a:cs typeface="Calibri" pitchFamily="34" charset="-120"/>
+              </a:rPr>
+              <a:t>Confusion matrix — Random Forest</a:t>
+            </a:r>
+            <a:endParaRPr lang="en-US" sz="1100" dirty="0"/>
+          </a:p>
+        </p:txBody>
+      </p:sp>
+      <p:sp>
+        <p:nvSpPr>
+          <p:cNvPr id="7" name="Text 3"/>
+          <p:cNvSpPr/>
+          <p:nvPr/>
+        </p:nvSpPr>
+        <p:spPr>
+          <a:xfrm>
+            <a:off x="457200" y="6473952"/>
+            <a:ext cx="8686800" cy="274320"/>
+          </a:xfrm>
+          <a:prstGeom prst="rect">
+            <a:avLst/>
+          </a:prstGeom>
+          <a:noFill/>
+          <a:ln/>
+        </p:spPr>
+        <p:txBody>
+          <a:bodyPr wrap="square" rtlCol="0" anchor="ctr"/>
+          <a:lstStyle/>
+          <a:p>
+            <a:pPr algn="l" indent="0" marL="0">
+              <a:buNone/>
+            </a:pPr>
+            <a:r>
+              <a:rPr lang="en-US" sz="900" dirty="0">
+                <a:solidFill>
+                  <a:srgbClr val="5B6660"/>
+                </a:solidFill>
+                <a:latin typeface="Calibri" pitchFamily="34" charset="0"/>
+                <a:ea typeface="Calibri" pitchFamily="34" charset="-122"/>
+                <a:cs typeface="Calibri" pitchFamily="34" charset="-120"/>
+              </a:rPr>
+              <a:t>BDS23114 Data Analytics  •  Predictive Modeling of FIFA World Cup Match Outcomes</a:t>
+            </a:r>
+            <a:endParaRPr lang="en-US" sz="900" dirty="0"/>
+          </a:p>
+        </p:txBody>
+      </p:sp>
+      <p:sp>
+        <p:nvSpPr>
+          <p:cNvPr id="8" name="Text 4"/>
+          <p:cNvSpPr/>
+          <p:nvPr/>
+        </p:nvSpPr>
+        <p:spPr>
+          <a:xfrm>
+            <a:off x="11274552" y="6473952"/>
+            <a:ext cx="457200" cy="274320"/>
+          </a:xfrm>
+          <a:prstGeom prst="rect">
+            <a:avLst/>
+          </a:prstGeom>
+          <a:noFill/>
+          <a:ln/>
+        </p:spPr>
+        <p:txBody>
+          <a:bodyPr wrap="square" rtlCol="0" anchor="ctr"/>
+          <a:lstStyle/>
+          <a:p>
+            <a:pPr algn="r" indent="0" marL="0">
+              <a:buNone/>
+            </a:pPr>
+            <a:r>
+              <a:rPr lang="en-US" sz="900" dirty="0">
+                <a:solidFill>
+                  <a:srgbClr val="5B6660"/>
+                </a:solidFill>
+                <a:latin typeface="Calibri" pitchFamily="34" charset="0"/>
+                <a:ea typeface="Calibri" pitchFamily="34" charset="-122"/>
+                <a:cs typeface="Calibri" pitchFamily="34" charset="-120"/>
+              </a:rPr>
+              <a:t>9</a:t>
+            </a:r>
+            <a:endParaRPr lang="en-US" sz="900" dirty="0"/>
           </a:p>
         </p:txBody>
       </p:sp>
       <p:pic>
         <p:nvPicPr>
-          <p:cNvPr id="5" name="Image 0" descr="media/image5.png">    </p:cNvPr>
+          <p:cNvPr id="11" name="Picture 10" descr="check_cell47.png"/>
           <p:cNvPicPr>
             <a:picLocks noChangeAspect="1"/>
           </p:cNvPicPr>
           <p:nvPr/>
         </p:nvPicPr>
         <p:blipFill>
-          <a:blip r:embed="rId1"/>
+          <a:blip r:embed="rId4"/>
           <a:stretch>
             <a:fillRect/>
           </a:stretch>
@@ -17148,123 +17281,6 @@
           </a:prstGeom>
         </p:spPr>
       </p:pic>
-      <p:sp>
-        <p:nvSpPr>
-          <p:cNvPr id="6" name="Text 2"/>
-          <p:cNvSpPr/>
-          <p:nvPr/>
-        </p:nvSpPr>
-        <p:spPr>
-          <a:xfrm>
-            <a:off x="7315200" y="4617720"/>
-            <a:ext cx="4251960" cy="320040"/>
-          </a:xfrm>
-          <a:prstGeom prst="rect">
-            <a:avLst/>
-          </a:prstGeom>
-          <a:noFill/>
-          <a:ln/>
-        </p:spPr>
-        <p:txBody>
-          <a:bodyPr wrap="square" rtlCol="0" anchor="ctr"/>
-          <a:lstStyle/>
-          <a:p>
-            <a:pPr algn="ctr" indent="0" marL="0">
-              <a:buNone/>
-            </a:pPr>
-            <a:r>
-              <a:rPr lang="en-US" sz="1100" i="1" dirty="0">
-                <a:solidFill>
-                  <a:srgbClr val="5B6660"/>
-                </a:solidFill>
-                <a:latin typeface="Calibri" pitchFamily="34" charset="0"/>
-                <a:ea typeface="Calibri" pitchFamily="34" charset="-122"/>
-                <a:cs typeface="Calibri" pitchFamily="34" charset="-120"/>
-              </a:rPr>
-              <a:t>Confusion matrix — Random Forest</a:t>
-            </a:r>
-            <a:endParaRPr lang="en-US" sz="1100" dirty="0"/>
-          </a:p>
-        </p:txBody>
-      </p:sp>
-      <p:sp>
-        <p:nvSpPr>
-          <p:cNvPr id="7" name="Text 3"/>
-          <p:cNvSpPr/>
-          <p:nvPr/>
-        </p:nvSpPr>
-        <p:spPr>
-          <a:xfrm>
-            <a:off x="457200" y="6473952"/>
-            <a:ext cx="8686800" cy="274320"/>
-          </a:xfrm>
-          <a:prstGeom prst="rect">
-            <a:avLst/>
-          </a:prstGeom>
-          <a:noFill/>
-          <a:ln/>
-        </p:spPr>
-        <p:txBody>
-          <a:bodyPr wrap="square" rtlCol="0" anchor="ctr"/>
-          <a:lstStyle/>
-          <a:p>
-            <a:pPr algn="l" indent="0" marL="0">
-              <a:buNone/>
-            </a:pPr>
-            <a:r>
-              <a:rPr lang="en-US" sz="900" dirty="0">
-                <a:solidFill>
-                  <a:srgbClr val="5B6660"/>
-                </a:solidFill>
-                <a:latin typeface="Calibri" pitchFamily="34" charset="0"/>
-                <a:ea typeface="Calibri" pitchFamily="34" charset="-122"/>
-                <a:cs typeface="Calibri" pitchFamily="34" charset="-120"/>
-              </a:rPr>
-              <a:t>BDS23114 Data Analytics  •  Predictive Modeling of FIFA World Cup Match Outcomes</a:t>
-            </a:r>
-            <a:endParaRPr lang="en-US" sz="900" dirty="0"/>
-          </a:p>
-        </p:txBody>
-      </p:sp>
-      <p:sp>
-        <p:nvSpPr>
-          <p:cNvPr id="8" name="Text 4"/>
-          <p:cNvSpPr/>
-          <p:nvPr/>
-        </p:nvSpPr>
-        <p:spPr>
-          <a:xfrm>
-            <a:off x="11274552" y="6473952"/>
-            <a:ext cx="457200" cy="274320"/>
-          </a:xfrm>
-          <a:prstGeom prst="rect">
-            <a:avLst/>
-          </a:prstGeom>
-          <a:noFill/>
-          <a:ln/>
-        </p:spPr>
-        <p:txBody>
-          <a:bodyPr wrap="square" rtlCol="0" anchor="ctr"/>
-          <a:lstStyle/>
-          <a:p>
-            <a:pPr algn="r" indent="0" marL="0">
-              <a:buNone/>
-            </a:pPr>
-            <a:r>
-              <a:rPr lang="en-US" sz="900" dirty="0">
-                <a:solidFill>
-                  <a:srgbClr val="5B6660"/>
-                </a:solidFill>
-                <a:latin typeface="Calibri" pitchFamily="34" charset="0"/>
-                <a:ea typeface="Calibri" pitchFamily="34" charset="-122"/>
-                <a:cs typeface="Calibri" pitchFamily="34" charset="-120"/>
-              </a:rPr>
-              <a:t>9</a:t>
-            </a:r>
-            <a:endParaRPr lang="en-US" sz="900" dirty="0"/>
-          </a:p>
-        </p:txBody>
-      </p:sp>
     </p:spTree>
   </p:cSld>
   <p:clrMapOvr>

--- a/presentation/World_Cup_Presentation.pptx
+++ b/presentation/World_Cup_Presentation.pptx
@@ -10071,6 +10071,10 @@
           </a:solidFill>
           <a:ln/>
         </p:spPr>
+        <p:txBody>
+          <a:bodyPr/>
+          <a:p/>
+        </p:txBody>
       </p:sp>
       <p:sp>
         <p:nvSpPr>
@@ -10172,6 +10176,10 @@
             <a:prstDash val="solid"/>
           </a:ln>
         </p:spPr>
+        <p:txBody>
+          <a:bodyPr/>
+          <a:p/>
+        </p:txBody>
       </p:sp>
       <p:sp>
         <p:nvSpPr>
@@ -10229,7 +10237,7 @@
                 <a:ea typeface="Calibri" pitchFamily="34" charset="-122"/>
                 <a:cs typeface="Calibri" pitchFamily="34" charset="-120"/>
               </a:rPr>
-              <a:t>Kaggle — International Football Results (martj42)</a:t>
+              <a:t>Kaggle — International Football Results (martj42) + FIFA World Cup All Dataset (abhijitdahatonde)</a:t>
             </a:r>
             <a:endParaRPr lang="en-US" sz="1200" dirty="0"/>
           </a:p>
@@ -11254,7 +11262,7 @@
                 <a:ea typeface="Calibri" pitchFamily="34" charset="-122"/>
                 <a:cs typeface="Calibri" pitchFamily="34" charset="-120"/>
               </a:rPr>
-              <a:t>International Football Results, 1872–2026 — Kaggle (martj42), continuously-updated snapshot</a:t>
+              <a:t>International Football Results, 1872–2026 — Kaggle (martj42) + FIFA World Cup All Dataset (abhijitdahatonde)</a:t>
             </a:r>
             <a:endParaRPr lang="en-US" sz="1400" dirty="0"/>
           </a:p>
@@ -11281,6 +11289,10 @@
           </a:solidFill>
           <a:ln/>
         </p:spPr>
+        <p:txBody>
+          <a:bodyPr/>
+          <a:p/>
+        </p:txBody>
       </p:sp>
       <p:sp>
         <p:nvSpPr>
@@ -11381,6 +11393,10 @@
           </a:solidFill>
           <a:ln/>
         </p:spPr>
+        <p:txBody>
+          <a:bodyPr/>
+          <a:p/>
+        </p:txBody>
       </p:sp>
       <p:sp>
         <p:nvSpPr>
@@ -11481,6 +11497,10 @@
           </a:solidFill>
           <a:ln/>
         </p:spPr>
+        <p:txBody>
+          <a:bodyPr/>
+          <a:p/>
+        </p:txBody>
       </p:sp>
       <p:sp>
         <p:nvSpPr>
@@ -11581,6 +11601,10 @@
           </a:solidFill>
           <a:ln/>
         </p:spPr>
+        <p:txBody>
+          <a:bodyPr/>
+          <a:p/>
+        </p:txBody>
       </p:sp>
       <p:sp>
         <p:nvSpPr>
@@ -11615,7 +11639,7 @@
                 <a:ea typeface="Cambria" pitchFamily="34" charset="-122"/>
                 <a:cs typeface="Cambria" pitchFamily="34" charset="-120"/>
               </a:rPr>
-              <a:t>3</a:t>
+              <a:t>4</a:t>
             </a:r>
             <a:endParaRPr lang="en-US" sz="3200" dirty="0"/>
           </a:p>
@@ -11759,6 +11783,10 @@
           </a:solidFill>
           <a:ln/>
         </p:spPr>
+        <p:txBody>
+          <a:bodyPr/>
+          <a:p/>
+        </p:txBody>
       </p:sp>
       <p:sp>
         <p:nvSpPr>
@@ -11781,6 +11809,10 @@
           </a:solidFill>
           <a:ln/>
         </p:spPr>
+        <p:txBody>
+          <a:bodyPr/>
+          <a:p/>
+        </p:txBody>
       </p:sp>
       <p:sp>
         <p:nvSpPr>
@@ -11881,6 +11913,10 @@
           </a:solidFill>
           <a:ln/>
         </p:spPr>
+        <p:txBody>
+          <a:bodyPr/>
+          <a:p/>
+        </p:txBody>
       </p:sp>
       <p:sp>
         <p:nvSpPr>
@@ -11903,6 +11939,10 @@
           </a:solidFill>
           <a:ln/>
         </p:spPr>
+        <p:txBody>
+          <a:bodyPr/>
+          <a:p/>
+        </p:txBody>
       </p:sp>
       <p:sp>
         <p:nvSpPr>
@@ -12003,6 +12043,10 @@
           </a:solidFill>
           <a:ln/>
         </p:spPr>
+        <p:txBody>
+          <a:bodyPr/>
+          <a:p/>
+        </p:txBody>
       </p:sp>
       <p:sp>
         <p:nvSpPr>
@@ -12025,6 +12069,10 @@
           </a:solidFill>
           <a:ln/>
         </p:spPr>
+        <p:txBody>
+          <a:bodyPr/>
+          <a:p/>
+        </p:txBody>
       </p:sp>
       <p:sp>
         <p:nvSpPr>
